--- a/ppt/RAG09-Chain.pptx
+++ b/ppt/RAG09-Chain.pptx
@@ -3914,15 +3914,7 @@
             <a:pPr lvl="1"/>
             <a:r>
               <a:rPr lang="fr-FR" dirty="0"/>
-              <a:t>Si </a:t>
-            </a:r>
-            <a:r>
-              <a:rPr lang="fr-FR" dirty="0" err="1"/>
-              <a:t>ke</a:t>
-            </a:r>
-            <a:r>
-              <a:rPr lang="fr-FR" dirty="0"/>
-              <a:t> score </a:t>
+              <a:t>Si le score </a:t>
             </a:r>
             <a:r>
               <a:rPr lang="fr-FR" dirty="0" err="1"/>
@@ -5399,13 +5391,6 @@
           </a:p>
           <a:p>
             <a:pPr lvl="1"/>
-            <a:r>
-              <a:rPr lang="fr-FR" dirty="0"/>
-              <a:t>Aujourd'hui il est préférable d'utiliser un modèle lié au fournisseur de LLM</a:t>
-            </a:r>
-          </a:p>
-          <a:p>
-            <a:pPr lvl="1"/>
             <a:endParaRPr lang="fr-FR" dirty="0"/>
           </a:p>
         </p:txBody>
@@ -5692,13 +5677,8 @@
             </a:r>
             <a:r>
               <a:rPr lang="fr-FR" dirty="0"/>
-              <a:t> à chaque </a:t>
-            </a:r>
-            <a:r>
-              <a:rPr lang="fr-FR" dirty="0" err="1"/>
-              <a:t>foit</a:t>
-            </a:r>
-            <a:endParaRPr lang="fr-FR" dirty="0"/>
+              <a:t> à chaque fois</a:t>
+            </a:r>
           </a:p>
           <a:p>
             <a:pPr lvl="1"/>
@@ -6306,9 +6286,10 @@
           <a:lstStyle/>
           <a:p>
             <a:r>
-              <a:rPr lang="fr-FR" dirty="0"/>
-              <a:t>Chainage par Graphe</a:t>
-            </a:r>
+              <a:rPr lang="fr-FR" dirty="0" err="1"/>
+              <a:t>LangGraph</a:t>
+            </a:r>
+            <a:endParaRPr lang="fr-FR" dirty="0"/>
           </a:p>
         </p:txBody>
       </p:sp>
